--- a/lect/CH-08-Content.pptx
+++ b/lect/CH-08-Content.pptx
@@ -6848,6 +6848,54 @@
           </a:p>
         </p:txBody>
       </p:sp>
+      <p:pic>
+        <p:nvPicPr>
+          <p:cNvPr id="6" name="Picture 5" descr="품목별_거래액.png"/>
+          <p:cNvPicPr>
+            <a:picLocks noChangeAspect="1"/>
+          </p:cNvPicPr>
+          <p:nvPr/>
+        </p:nvPicPr>
+        <p:blipFill>
+          <a:blip r:embed="rId2"/>
+          <a:stretch>
+            <a:fillRect/>
+          </a:stretch>
+        </p:blipFill>
+        <p:spPr>
+          <a:xfrm>
+            <a:off x="1870201" y="3169920"/>
+            <a:ext cx="5049981" cy="3291840"/>
+          </a:xfrm>
+          <a:prstGeom prst="rect">
+            <a:avLst/>
+          </a:prstGeom>
+        </p:spPr>
+      </p:pic>
+      <p:pic>
+        <p:nvPicPr>
+          <p:cNvPr id="7" name="Picture 6" descr="ch06_품목별_비중.png"/>
+          <p:cNvPicPr>
+            <a:picLocks noChangeAspect="1"/>
+          </p:cNvPicPr>
+          <p:nvPr/>
+        </p:nvPicPr>
+        <p:blipFill>
+          <a:blip r:embed="rId3"/>
+          <a:stretch>
+            <a:fillRect/>
+          </a:stretch>
+        </p:blipFill>
+        <p:spPr>
+          <a:xfrm>
+            <a:off x="7194503" y="3169920"/>
+            <a:ext cx="3126990" cy="3291840"/>
+          </a:xfrm>
+          <a:prstGeom prst="rect">
+            <a:avLst/>
+          </a:prstGeom>
+        </p:spPr>
+      </p:pic>
     </p:spTree>
   </p:cSld>
   <p:clrMapOvr>
@@ -8871,6 +8919,54 @@
           </a:graphicData>
         </a:graphic>
       </p:graphicFrame>
+      <p:pic>
+        <p:nvPicPr>
+          <p:cNvPr id="6" name="Picture 5" descr="품목별_거래액.png"/>
+          <p:cNvPicPr>
+            <a:picLocks noChangeAspect="1"/>
+          </p:cNvPicPr>
+          <p:nvPr/>
+        </p:nvPicPr>
+        <p:blipFill>
+          <a:blip r:embed="rId2"/>
+          <a:stretch>
+            <a:fillRect/>
+          </a:stretch>
+        </p:blipFill>
+        <p:spPr>
+          <a:xfrm>
+            <a:off x="1870201" y="3286759"/>
+            <a:ext cx="5049981" cy="3291840"/>
+          </a:xfrm>
+          <a:prstGeom prst="rect">
+            <a:avLst/>
+          </a:prstGeom>
+        </p:spPr>
+      </p:pic>
+      <p:pic>
+        <p:nvPicPr>
+          <p:cNvPr id="7" name="Picture 6" descr="ch06_품목별_비중.png"/>
+          <p:cNvPicPr>
+            <a:picLocks noChangeAspect="1"/>
+          </p:cNvPicPr>
+          <p:nvPr/>
+        </p:nvPicPr>
+        <p:blipFill>
+          <a:blip r:embed="rId3"/>
+          <a:stretch>
+            <a:fillRect/>
+          </a:stretch>
+        </p:blipFill>
+        <p:spPr>
+          <a:xfrm>
+            <a:off x="7194503" y="3286759"/>
+            <a:ext cx="3126990" cy="3291840"/>
+          </a:xfrm>
+          <a:prstGeom prst="rect">
+            <a:avLst/>
+          </a:prstGeom>
+        </p:spPr>
+      </p:pic>
     </p:spTree>
   </p:cSld>
   <p:clrMapOvr>
